--- a/decks/Lowtech-Carrier-Presentation.pptx
+++ b/decks/Lowtech-Carrier-Presentation.pptx
@@ -5,21 +5,21 @@
     <p:sldMasterId id="2147483648" r:id="rId1"/>
   </p:sldMasterIdLst>
   <p:sldIdLst>
-    <p:sldId id="256" r:id="rId7"/>
-    <p:sldId id="257" r:id="rId8"/>
-    <p:sldId id="258" r:id="rId9"/>
-    <p:sldId id="259" r:id="rId10"/>
-    <p:sldId id="260" r:id="rId11"/>
-    <p:sldId id="261" r:id="rId12"/>
-    <p:sldId id="262" r:id="rId13"/>
-    <p:sldId id="263" r:id="rId14"/>
-    <p:sldId id="264" r:id="rId15"/>
-    <p:sldId id="265" r:id="rId16"/>
-    <p:sldId id="266" r:id="rId17"/>
-    <p:sldId id="267" r:id="rId18"/>
-    <p:sldId id="268" r:id="rId19"/>
+    <p:sldId id="256" r:id="rId2"/>
+    <p:sldId id="257" r:id="rId3"/>
+    <p:sldId id="258" r:id="rId4"/>
+    <p:sldId id="259" r:id="rId5"/>
+    <p:sldId id="260" r:id="rId6"/>
+    <p:sldId id="261" r:id="rId7"/>
+    <p:sldId id="262" r:id="rId8"/>
+    <p:sldId id="263" r:id="rId9"/>
+    <p:sldId id="264" r:id="rId10"/>
+    <p:sldId id="265" r:id="rId11"/>
+    <p:sldId id="266" r:id="rId12"/>
+    <p:sldId id="267" r:id="rId13"/>
+    <p:sldId id="268" r:id="rId14"/>
   </p:sldIdLst>
-  <p:sldSz cx="12191695" cy="6858000" type="screen4x3"/>
+  <p:sldSz cx="12192000" cy="6858000"/>
   <p:notesSz cx="6858000" cy="9144000"/>
   <p:defaultTextStyle>
     <a:defPPr>
@@ -116,6 +116,22 @@
       </a:defRPr>
     </a:lvl9pPr>
   </p:defaultTextStyle>
+  <p:extLst>
+    <p:ext uri="{EFAFB233-063F-42B5-8137-9DF3F51BA10A}">
+      <p15:sldGuideLst xmlns:p15="http://schemas.microsoft.com/office/powerpoint/2012/main">
+        <p15:guide id="1" orient="horz" pos="2160">
+          <p15:clr>
+            <a:srgbClr val="A4A3A4"/>
+          </p15:clr>
+        </p15:guide>
+        <p15:guide id="2" pos="2880">
+          <p15:clr>
+            <a:srgbClr val="A4A3A4"/>
+          </p15:clr>
+        </p15:guide>
+      </p15:sldGuideLst>
+    </p:ext>
+  </p:extLst>
 </p:presentation>
 </file>
 
@@ -157,10 +173,9 @@
           <a:lstStyle/>
           <a:p>
             <a:r>
-              <a:rPr lang="en-US" smtClean="0"/>
+              <a:rPr lang="en-US"/>
               <a:t>Click to edit Master title style</a:t>
             </a:r>
-            <a:endParaRPr lang="en-US"/>
           </a:p>
         </p:txBody>
       </p:sp>
@@ -276,10 +291,9 @@
           </a:lstStyle>
           <a:p>
             <a:r>
-              <a:rPr lang="en-US" smtClean="0"/>
+              <a:rPr lang="en-US"/>
               <a:t>Click to edit Master subtitle style</a:t>
             </a:r>
-            <a:endParaRPr lang="en-US"/>
           </a:p>
         </p:txBody>
       </p:sp>
@@ -300,7 +314,7 @@
           <a:p>
             <a:fld id="{5BCAD085-E8A6-8845-BD4E-CB4CCA059FC4}" type="datetimeFigureOut">
               <a:rPr lang="en-US" smtClean="0"/>
-              <a:t>1/27/13</a:t>
+              <a:t>7/1/2026</a:t>
             </a:fld>
             <a:endParaRPr lang="en-US"/>
           </a:p>
@@ -394,10 +408,9 @@
           <a:lstStyle/>
           <a:p>
             <a:r>
-              <a:rPr lang="en-US" smtClean="0"/>
+              <a:rPr lang="en-US"/>
               <a:t>Click to edit Master title style</a:t>
             </a:r>
-            <a:endParaRPr lang="en-US"/>
           </a:p>
         </p:txBody>
       </p:sp>
@@ -418,38 +431,37 @@
           <a:p>
             <a:pPr lvl="0"/>
             <a:r>
-              <a:rPr lang="en-US" smtClean="0"/>
+              <a:rPr lang="en-US"/>
               <a:t>Click to edit Master text styles</a:t>
             </a:r>
           </a:p>
           <a:p>
             <a:pPr lvl="1"/>
             <a:r>
-              <a:rPr lang="en-US" smtClean="0"/>
+              <a:rPr lang="en-US"/>
               <a:t>Second level</a:t>
             </a:r>
           </a:p>
           <a:p>
             <a:pPr lvl="2"/>
             <a:r>
-              <a:rPr lang="en-US" smtClean="0"/>
+              <a:rPr lang="en-US"/>
               <a:t>Third level</a:t>
             </a:r>
           </a:p>
           <a:p>
             <a:pPr lvl="3"/>
             <a:r>
-              <a:rPr lang="en-US" smtClean="0"/>
+              <a:rPr lang="en-US"/>
               <a:t>Fourth level</a:t>
             </a:r>
           </a:p>
           <a:p>
             <a:pPr lvl="4"/>
             <a:r>
-              <a:rPr lang="en-US" smtClean="0"/>
+              <a:rPr lang="en-US"/>
               <a:t>Fifth level</a:t>
             </a:r>
-            <a:endParaRPr lang="en-US"/>
           </a:p>
         </p:txBody>
       </p:sp>
@@ -470,7 +482,7 @@
           <a:p>
             <a:fld id="{5BCAD085-E8A6-8845-BD4E-CB4CCA059FC4}" type="datetimeFigureOut">
               <a:rPr lang="en-US" smtClean="0"/>
-              <a:t>1/27/13</a:t>
+              <a:t>7/1/2026</a:t>
             </a:fld>
             <a:endParaRPr lang="en-US"/>
           </a:p>
@@ -569,10 +581,9 @@
           <a:lstStyle/>
           <a:p>
             <a:r>
-              <a:rPr lang="en-US" smtClean="0"/>
+              <a:rPr lang="en-US"/>
               <a:t>Click to edit Master title style</a:t>
             </a:r>
-            <a:endParaRPr lang="en-US"/>
           </a:p>
         </p:txBody>
       </p:sp>
@@ -598,38 +609,37 @@
           <a:p>
             <a:pPr lvl="0"/>
             <a:r>
-              <a:rPr lang="en-US" smtClean="0"/>
+              <a:rPr lang="en-US"/>
               <a:t>Click to edit Master text styles</a:t>
             </a:r>
           </a:p>
           <a:p>
             <a:pPr lvl="1"/>
             <a:r>
-              <a:rPr lang="en-US" smtClean="0"/>
+              <a:rPr lang="en-US"/>
               <a:t>Second level</a:t>
             </a:r>
           </a:p>
           <a:p>
             <a:pPr lvl="2"/>
             <a:r>
-              <a:rPr lang="en-US" smtClean="0"/>
+              <a:rPr lang="en-US"/>
               <a:t>Third level</a:t>
             </a:r>
           </a:p>
           <a:p>
             <a:pPr lvl="3"/>
             <a:r>
-              <a:rPr lang="en-US" smtClean="0"/>
+              <a:rPr lang="en-US"/>
               <a:t>Fourth level</a:t>
             </a:r>
           </a:p>
           <a:p>
             <a:pPr lvl="4"/>
             <a:r>
-              <a:rPr lang="en-US" smtClean="0"/>
+              <a:rPr lang="en-US"/>
               <a:t>Fifth level</a:t>
             </a:r>
-            <a:endParaRPr lang="en-US"/>
           </a:p>
         </p:txBody>
       </p:sp>
@@ -650,7 +660,7 @@
           <a:p>
             <a:fld id="{5BCAD085-E8A6-8845-BD4E-CB4CCA059FC4}" type="datetimeFigureOut">
               <a:rPr lang="en-US" smtClean="0"/>
-              <a:t>1/27/13</a:t>
+              <a:t>7/1/2026</a:t>
             </a:fld>
             <a:endParaRPr lang="en-US"/>
           </a:p>
@@ -744,10 +754,9 @@
           <a:lstStyle/>
           <a:p>
             <a:r>
-              <a:rPr lang="en-US" smtClean="0"/>
+              <a:rPr lang="en-US"/>
               <a:t>Click to edit Master title style</a:t>
             </a:r>
-            <a:endParaRPr lang="en-US"/>
           </a:p>
         </p:txBody>
       </p:sp>
@@ -768,38 +777,37 @@
           <a:p>
             <a:pPr lvl="0"/>
             <a:r>
-              <a:rPr lang="en-US" smtClean="0"/>
+              <a:rPr lang="en-US"/>
               <a:t>Click to edit Master text styles</a:t>
             </a:r>
           </a:p>
           <a:p>
             <a:pPr lvl="1"/>
             <a:r>
-              <a:rPr lang="en-US" smtClean="0"/>
+              <a:rPr lang="en-US"/>
               <a:t>Second level</a:t>
             </a:r>
           </a:p>
           <a:p>
             <a:pPr lvl="2"/>
             <a:r>
-              <a:rPr lang="en-US" smtClean="0"/>
+              <a:rPr lang="en-US"/>
               <a:t>Third level</a:t>
             </a:r>
           </a:p>
           <a:p>
             <a:pPr lvl="3"/>
             <a:r>
-              <a:rPr lang="en-US" smtClean="0"/>
+              <a:rPr lang="en-US"/>
               <a:t>Fourth level</a:t>
             </a:r>
           </a:p>
           <a:p>
             <a:pPr lvl="4"/>
             <a:r>
-              <a:rPr lang="en-US" smtClean="0"/>
+              <a:rPr lang="en-US"/>
               <a:t>Fifth level</a:t>
             </a:r>
-            <a:endParaRPr lang="en-US"/>
           </a:p>
         </p:txBody>
       </p:sp>
@@ -820,7 +828,7 @@
           <a:p>
             <a:fld id="{5BCAD085-E8A6-8845-BD4E-CB4CCA059FC4}" type="datetimeFigureOut">
               <a:rPr lang="en-US" smtClean="0"/>
-              <a:t>1/27/13</a:t>
+              <a:t>7/1/2026</a:t>
             </a:fld>
             <a:endParaRPr lang="en-US"/>
           </a:p>
@@ -923,10 +931,9 @@
           </a:lstStyle>
           <a:p>
             <a:r>
-              <a:rPr lang="en-US" smtClean="0"/>
+              <a:rPr lang="en-US"/>
               <a:t>Click to edit Master title style</a:t>
             </a:r>
-            <a:endParaRPr lang="en-US"/>
           </a:p>
         </p:txBody>
       </p:sp>
@@ -1043,7 +1050,7 @@
           <a:p>
             <a:pPr lvl="0"/>
             <a:r>
-              <a:rPr lang="en-US" smtClean="0"/>
+              <a:rPr lang="en-US"/>
               <a:t>Click to edit Master text styles</a:t>
             </a:r>
           </a:p>
@@ -1066,7 +1073,7 @@
           <a:p>
             <a:fld id="{5BCAD085-E8A6-8845-BD4E-CB4CCA059FC4}" type="datetimeFigureOut">
               <a:rPr lang="en-US" smtClean="0"/>
-              <a:t>1/27/13</a:t>
+              <a:t>7/1/2026</a:t>
             </a:fld>
             <a:endParaRPr lang="en-US"/>
           </a:p>
@@ -1160,10 +1167,9 @@
           <a:lstStyle/>
           <a:p>
             <a:r>
-              <a:rPr lang="en-US" smtClean="0"/>
+              <a:rPr lang="en-US"/>
               <a:t>Click to edit Master title style</a:t>
             </a:r>
-            <a:endParaRPr lang="en-US"/>
           </a:p>
         </p:txBody>
       </p:sp>
@@ -1217,38 +1223,37 @@
           <a:p>
             <a:pPr lvl="0"/>
             <a:r>
-              <a:rPr lang="en-US" smtClean="0"/>
+              <a:rPr lang="en-US"/>
               <a:t>Click to edit Master text styles</a:t>
             </a:r>
           </a:p>
           <a:p>
             <a:pPr lvl="1"/>
             <a:r>
-              <a:rPr lang="en-US" smtClean="0"/>
+              <a:rPr lang="en-US"/>
               <a:t>Second level</a:t>
             </a:r>
           </a:p>
           <a:p>
             <a:pPr lvl="2"/>
             <a:r>
-              <a:rPr lang="en-US" smtClean="0"/>
+              <a:rPr lang="en-US"/>
               <a:t>Third level</a:t>
             </a:r>
           </a:p>
           <a:p>
             <a:pPr lvl="3"/>
             <a:r>
-              <a:rPr lang="en-US" smtClean="0"/>
+              <a:rPr lang="en-US"/>
               <a:t>Fourth level</a:t>
             </a:r>
           </a:p>
           <a:p>
             <a:pPr lvl="4"/>
             <a:r>
-              <a:rPr lang="en-US" smtClean="0"/>
+              <a:rPr lang="en-US"/>
               <a:t>Fifth level</a:t>
             </a:r>
-            <a:endParaRPr lang="en-US"/>
           </a:p>
         </p:txBody>
       </p:sp>
@@ -1302,38 +1307,37 @@
           <a:p>
             <a:pPr lvl="0"/>
             <a:r>
-              <a:rPr lang="en-US" smtClean="0"/>
+              <a:rPr lang="en-US"/>
               <a:t>Click to edit Master text styles</a:t>
             </a:r>
           </a:p>
           <a:p>
             <a:pPr lvl="1"/>
             <a:r>
-              <a:rPr lang="en-US" smtClean="0"/>
+              <a:rPr lang="en-US"/>
               <a:t>Second level</a:t>
             </a:r>
           </a:p>
           <a:p>
             <a:pPr lvl="2"/>
             <a:r>
-              <a:rPr lang="en-US" smtClean="0"/>
+              <a:rPr lang="en-US"/>
               <a:t>Third level</a:t>
             </a:r>
           </a:p>
           <a:p>
             <a:pPr lvl="3"/>
             <a:r>
-              <a:rPr lang="en-US" smtClean="0"/>
+              <a:rPr lang="en-US"/>
               <a:t>Fourth level</a:t>
             </a:r>
           </a:p>
           <a:p>
             <a:pPr lvl="4"/>
             <a:r>
-              <a:rPr lang="en-US" smtClean="0"/>
+              <a:rPr lang="en-US"/>
               <a:t>Fifth level</a:t>
             </a:r>
-            <a:endParaRPr lang="en-US"/>
           </a:p>
         </p:txBody>
       </p:sp>
@@ -1354,7 +1358,7 @@
           <a:p>
             <a:fld id="{5BCAD085-E8A6-8845-BD4E-CB4CCA059FC4}" type="datetimeFigureOut">
               <a:rPr lang="en-US" smtClean="0"/>
-              <a:t>1/27/13</a:t>
+              <a:t>7/1/2026</a:t>
             </a:fld>
             <a:endParaRPr lang="en-US"/>
           </a:p>
@@ -1452,10 +1456,9 @@
           </a:lstStyle>
           <a:p>
             <a:r>
-              <a:rPr lang="en-US" smtClean="0"/>
+              <a:rPr lang="en-US"/>
               <a:t>Click to edit Master title style</a:t>
             </a:r>
-            <a:endParaRPr lang="en-US"/>
           </a:p>
         </p:txBody>
       </p:sp>
@@ -1518,7 +1521,7 @@
           <a:p>
             <a:pPr lvl="0"/>
             <a:r>
-              <a:rPr lang="en-US" smtClean="0"/>
+              <a:rPr lang="en-US"/>
               <a:t>Click to edit Master text styles</a:t>
             </a:r>
           </a:p>
@@ -1574,38 +1577,37 @@
           <a:p>
             <a:pPr lvl="0"/>
             <a:r>
-              <a:rPr lang="en-US" smtClean="0"/>
+              <a:rPr lang="en-US"/>
               <a:t>Click to edit Master text styles</a:t>
             </a:r>
           </a:p>
           <a:p>
             <a:pPr lvl="1"/>
             <a:r>
-              <a:rPr lang="en-US" smtClean="0"/>
+              <a:rPr lang="en-US"/>
               <a:t>Second level</a:t>
             </a:r>
           </a:p>
           <a:p>
             <a:pPr lvl="2"/>
             <a:r>
-              <a:rPr lang="en-US" smtClean="0"/>
+              <a:rPr lang="en-US"/>
               <a:t>Third level</a:t>
             </a:r>
           </a:p>
           <a:p>
             <a:pPr lvl="3"/>
             <a:r>
-              <a:rPr lang="en-US" smtClean="0"/>
+              <a:rPr lang="en-US"/>
               <a:t>Fourth level</a:t>
             </a:r>
           </a:p>
           <a:p>
             <a:pPr lvl="4"/>
             <a:r>
-              <a:rPr lang="en-US" smtClean="0"/>
+              <a:rPr lang="en-US"/>
               <a:t>Fifth level</a:t>
             </a:r>
-            <a:endParaRPr lang="en-US"/>
           </a:p>
         </p:txBody>
       </p:sp>
@@ -1668,7 +1670,7 @@
           <a:p>
             <a:pPr lvl="0"/>
             <a:r>
-              <a:rPr lang="en-US" smtClean="0"/>
+              <a:rPr lang="en-US"/>
               <a:t>Click to edit Master text styles</a:t>
             </a:r>
           </a:p>
@@ -1724,38 +1726,37 @@
           <a:p>
             <a:pPr lvl="0"/>
             <a:r>
-              <a:rPr lang="en-US" smtClean="0"/>
+              <a:rPr lang="en-US"/>
               <a:t>Click to edit Master text styles</a:t>
             </a:r>
           </a:p>
           <a:p>
             <a:pPr lvl="1"/>
             <a:r>
-              <a:rPr lang="en-US" smtClean="0"/>
+              <a:rPr lang="en-US"/>
               <a:t>Second level</a:t>
             </a:r>
           </a:p>
           <a:p>
             <a:pPr lvl="2"/>
             <a:r>
-              <a:rPr lang="en-US" smtClean="0"/>
+              <a:rPr lang="en-US"/>
               <a:t>Third level</a:t>
             </a:r>
           </a:p>
           <a:p>
             <a:pPr lvl="3"/>
             <a:r>
-              <a:rPr lang="en-US" smtClean="0"/>
+              <a:rPr lang="en-US"/>
               <a:t>Fourth level</a:t>
             </a:r>
           </a:p>
           <a:p>
             <a:pPr lvl="4"/>
             <a:r>
-              <a:rPr lang="en-US" smtClean="0"/>
+              <a:rPr lang="en-US"/>
               <a:t>Fifth level</a:t>
             </a:r>
-            <a:endParaRPr lang="en-US"/>
           </a:p>
         </p:txBody>
       </p:sp>
@@ -1776,7 +1777,7 @@
           <a:p>
             <a:fld id="{5BCAD085-E8A6-8845-BD4E-CB4CCA059FC4}" type="datetimeFigureOut">
               <a:rPr lang="en-US" smtClean="0"/>
-              <a:t>1/27/13</a:t>
+              <a:t>7/1/2026</a:t>
             </a:fld>
             <a:endParaRPr lang="en-US"/>
           </a:p>
@@ -1870,10 +1871,9 @@
           <a:lstStyle/>
           <a:p>
             <a:r>
-              <a:rPr lang="en-US" smtClean="0"/>
+              <a:rPr lang="en-US"/>
               <a:t>Click to edit Master title style</a:t>
             </a:r>
-            <a:endParaRPr lang="en-US"/>
           </a:p>
         </p:txBody>
       </p:sp>
@@ -1894,7 +1894,7 @@
           <a:p>
             <a:fld id="{5BCAD085-E8A6-8845-BD4E-CB4CCA059FC4}" type="datetimeFigureOut">
               <a:rPr lang="en-US" smtClean="0"/>
-              <a:t>1/27/13</a:t>
+              <a:t>7/1/2026</a:t>
             </a:fld>
             <a:endParaRPr lang="en-US"/>
           </a:p>
@@ -1989,7 +1989,7 @@
           <a:p>
             <a:fld id="{5BCAD085-E8A6-8845-BD4E-CB4CCA059FC4}" type="datetimeFigureOut">
               <a:rPr lang="en-US" smtClean="0"/>
-              <a:t>1/27/13</a:t>
+              <a:t>7/1/2026</a:t>
             </a:fld>
             <a:endParaRPr lang="en-US"/>
           </a:p>
@@ -2092,10 +2092,9 @@
           </a:lstStyle>
           <a:p>
             <a:r>
-              <a:rPr lang="en-US" smtClean="0"/>
+              <a:rPr lang="en-US"/>
               <a:t>Click to edit Master title style</a:t>
             </a:r>
-            <a:endParaRPr lang="en-US"/>
           </a:p>
         </p:txBody>
       </p:sp>
@@ -2149,38 +2148,37 @@
           <a:p>
             <a:pPr lvl="0"/>
             <a:r>
-              <a:rPr lang="en-US" smtClean="0"/>
+              <a:rPr lang="en-US"/>
               <a:t>Click to edit Master text styles</a:t>
             </a:r>
           </a:p>
           <a:p>
             <a:pPr lvl="1"/>
             <a:r>
-              <a:rPr lang="en-US" smtClean="0"/>
+              <a:rPr lang="en-US"/>
               <a:t>Second level</a:t>
             </a:r>
           </a:p>
           <a:p>
             <a:pPr lvl="2"/>
             <a:r>
-              <a:rPr lang="en-US" smtClean="0"/>
+              <a:rPr lang="en-US"/>
               <a:t>Third level</a:t>
             </a:r>
           </a:p>
           <a:p>
             <a:pPr lvl="3"/>
             <a:r>
-              <a:rPr lang="en-US" smtClean="0"/>
+              <a:rPr lang="en-US"/>
               <a:t>Fourth level</a:t>
             </a:r>
           </a:p>
           <a:p>
             <a:pPr lvl="4"/>
             <a:r>
-              <a:rPr lang="en-US" smtClean="0"/>
+              <a:rPr lang="en-US"/>
               <a:t>Fifth level</a:t>
             </a:r>
-            <a:endParaRPr lang="en-US"/>
           </a:p>
         </p:txBody>
       </p:sp>
@@ -2243,7 +2241,7 @@
           <a:p>
             <a:pPr lvl="0"/>
             <a:r>
-              <a:rPr lang="en-US" smtClean="0"/>
+              <a:rPr lang="en-US"/>
               <a:t>Click to edit Master text styles</a:t>
             </a:r>
           </a:p>
@@ -2266,7 +2264,7 @@
           <a:p>
             <a:fld id="{5BCAD085-E8A6-8845-BD4E-CB4CCA059FC4}" type="datetimeFigureOut">
               <a:rPr lang="en-US" smtClean="0"/>
-              <a:t>1/27/13</a:t>
+              <a:t>7/1/2026</a:t>
             </a:fld>
             <a:endParaRPr lang="en-US"/>
           </a:p>
@@ -2369,10 +2367,9 @@
           </a:lstStyle>
           <a:p>
             <a:r>
-              <a:rPr lang="en-US" smtClean="0"/>
+              <a:rPr lang="en-US"/>
               <a:t>Click to edit Master title style</a:t>
             </a:r>
-            <a:endParaRPr lang="en-US"/>
           </a:p>
         </p:txBody>
       </p:sp>
@@ -2496,7 +2493,7 @@
           <a:p>
             <a:pPr lvl="0"/>
             <a:r>
-              <a:rPr lang="en-US" smtClean="0"/>
+              <a:rPr lang="en-US"/>
               <a:t>Click to edit Master text styles</a:t>
             </a:r>
           </a:p>
@@ -2519,7 +2516,7 @@
           <a:p>
             <a:fld id="{5BCAD085-E8A6-8845-BD4E-CB4CCA059FC4}" type="datetimeFigureOut">
               <a:rPr lang="en-US" smtClean="0"/>
-              <a:t>1/27/13</a:t>
+              <a:t>7/1/2026</a:t>
             </a:fld>
             <a:endParaRPr lang="en-US"/>
           </a:p>
@@ -2628,10 +2625,9 @@
           <a:lstStyle/>
           <a:p>
             <a:r>
-              <a:rPr lang="en-US" smtClean="0"/>
+              <a:rPr lang="en-US"/>
               <a:t>Click to edit Master title style</a:t>
             </a:r>
-            <a:endParaRPr lang="en-US"/>
           </a:p>
         </p:txBody>
       </p:sp>
@@ -2662,38 +2658,37 @@
           <a:p>
             <a:pPr lvl="0"/>
             <a:r>
-              <a:rPr lang="en-US" smtClean="0"/>
+              <a:rPr lang="en-US"/>
               <a:t>Click to edit Master text styles</a:t>
             </a:r>
           </a:p>
           <a:p>
             <a:pPr lvl="1"/>
             <a:r>
-              <a:rPr lang="en-US" smtClean="0"/>
+              <a:rPr lang="en-US"/>
               <a:t>Second level</a:t>
             </a:r>
           </a:p>
           <a:p>
             <a:pPr lvl="2"/>
             <a:r>
-              <a:rPr lang="en-US" smtClean="0"/>
+              <a:rPr lang="en-US"/>
               <a:t>Third level</a:t>
             </a:r>
           </a:p>
           <a:p>
             <a:pPr lvl="3"/>
             <a:r>
-              <a:rPr lang="en-US" smtClean="0"/>
+              <a:rPr lang="en-US"/>
               <a:t>Fourth level</a:t>
             </a:r>
           </a:p>
           <a:p>
             <a:pPr lvl="4"/>
             <a:r>
-              <a:rPr lang="en-US" smtClean="0"/>
+              <a:rPr lang="en-US"/>
               <a:t>Fifth level</a:t>
             </a:r>
-            <a:endParaRPr lang="en-US"/>
           </a:p>
         </p:txBody>
       </p:sp>
@@ -2732,7 +2727,7 @@
           <a:p>
             <a:fld id="{5BCAD085-E8A6-8845-BD4E-CB4CCA059FC4}" type="datetimeFigureOut">
               <a:rPr lang="en-US" smtClean="0"/>
-              <a:t>1/27/13</a:t>
+              <a:t>7/1/2026</a:t>
             </a:fld>
             <a:endParaRPr lang="en-US"/>
           </a:p>
@@ -3091,7 +3086,7 @@
 </file>
 
 <file path=ppt/slides/slide1.xml><?xml version="1.0" encoding="utf-8"?>
-<p:sld xmlns:a="http://schemas.openxmlformats.org/drawingml/2006/main" xmlns:p="http://schemas.openxmlformats.org/presentationml/2006/main" xmlns:r="http://schemas.openxmlformats.org/officeDocument/2006/relationships">
+<p:sld xmlns:a="http://schemas.openxmlformats.org/drawingml/2006/main" xmlns:r="http://schemas.openxmlformats.org/officeDocument/2006/relationships" xmlns:p="http://schemas.openxmlformats.org/presentationml/2006/main">
   <p:cSld>
     <p:bg>
       <p:bgPr>
@@ -3107,7 +3102,14 @@
         <p:cNvGrpSpPr/>
         <p:nvPr/>
       </p:nvGrpSpPr>
-      <p:grpSpPr/>
+      <p:grpSpPr>
+        <a:xfrm>
+          <a:off x="0" y="0"/>
+          <a:ext cx="0" cy="0"/>
+          <a:chOff x="0" y="0"/>
+          <a:chExt cx="0" cy="0"/>
+        </a:xfrm>
+      </p:grpSpPr>
       <p:sp>
         <p:nvSpPr>
           <p:cNvPr id="2" name="Rectangle 1"/>
@@ -3149,6 +3151,7 @@
           <a:lstStyle/>
           <a:p>
             <a:pPr algn="ctr"/>
+            <a:endParaRPr/>
           </a:p>
         </p:txBody>
       </p:sp>
@@ -3193,6 +3196,7 @@
           <a:lstStyle/>
           <a:p>
             <a:pPr algn="ctr"/>
+            <a:endParaRPr/>
           </a:p>
         </p:txBody>
       </p:sp>
@@ -3237,6 +3241,7 @@
           <a:lstStyle/>
           <a:p>
             <a:pPr algn="ctr"/>
+            <a:endParaRPr/>
           </a:p>
         </p:txBody>
       </p:sp>
@@ -3300,7 +3305,7 @@
           <a:noFill/>
         </p:spPr>
         <p:txBody>
-          <a:bodyPr wrap="square" anchor="t" lIns="0" rIns="0" tIns="0" bIns="0">
+          <a:bodyPr wrap="square" lIns="0" tIns="0" rIns="0" bIns="0" anchor="t">
             <a:spAutoFit/>
           </a:bodyPr>
           <a:lstStyle/>
@@ -3345,7 +3350,7 @@
           <a:noFill/>
         </p:spPr>
         <p:txBody>
-          <a:bodyPr wrap="square" anchor="t" lIns="0" rIns="0" tIns="0" bIns="0">
+          <a:bodyPr wrap="square" lIns="0" tIns="0" rIns="0" bIns="0" anchor="t">
             <a:spAutoFit/>
           </a:bodyPr>
           <a:lstStyle/>
@@ -3390,7 +3395,7 @@
           <a:noFill/>
         </p:spPr>
         <p:txBody>
-          <a:bodyPr wrap="square" anchor="t" lIns="0" rIns="0" tIns="0" bIns="0">
+          <a:bodyPr wrap="square" lIns="0" tIns="0" rIns="0" bIns="0" anchor="t">
             <a:spAutoFit/>
           </a:bodyPr>
           <a:lstStyle/>
@@ -3435,7 +3440,7 @@
           <a:noFill/>
         </p:spPr>
         <p:txBody>
-          <a:bodyPr wrap="square" anchor="t" lIns="0" rIns="0" tIns="0" bIns="0">
+          <a:bodyPr wrap="square" lIns="0" tIns="0" rIns="0" bIns="0" anchor="t">
             <a:spAutoFit/>
           </a:bodyPr>
           <a:lstStyle/>
@@ -3458,7 +3463,7 @@
                 </a:solidFill>
                 <a:latin typeface="Cambria"/>
               </a:rPr>
-              <a:t>The tech disappears.</a:t>
+              <a:t>Technology made simple.</a:t>
             </a:r>
           </a:p>
           <a:p>
@@ -3480,7 +3485,7 @@
                 </a:solidFill>
                 <a:latin typeface="Cambria"/>
               </a:rPr>
-              <a:t>The results don't.</a:t>
+              <a:t>Growth made exponential.</a:t>
             </a:r>
           </a:p>
         </p:txBody>
@@ -3546,7 +3551,7 @@
 </file>
 
 <file path=ppt/slides/slide10.xml><?xml version="1.0" encoding="utf-8"?>
-<p:sld xmlns:a="http://schemas.openxmlformats.org/drawingml/2006/main" xmlns:p="http://schemas.openxmlformats.org/presentationml/2006/main" xmlns:r="http://schemas.openxmlformats.org/officeDocument/2006/relationships">
+<p:sld xmlns:a="http://schemas.openxmlformats.org/drawingml/2006/main" xmlns:r="http://schemas.openxmlformats.org/officeDocument/2006/relationships" xmlns:p="http://schemas.openxmlformats.org/presentationml/2006/main">
   <p:cSld>
     <p:bg>
       <p:bgPr>
@@ -3562,7 +3567,14 @@
         <p:cNvGrpSpPr/>
         <p:nvPr/>
       </p:nvGrpSpPr>
-      <p:grpSpPr/>
+      <p:grpSpPr>
+        <a:xfrm>
+          <a:off x="0" y="0"/>
+          <a:ext cx="0" cy="0"/>
+          <a:chOff x="0" y="0"/>
+          <a:chExt cx="0" cy="0"/>
+        </a:xfrm>
+      </p:grpSpPr>
       <p:sp>
         <p:nvSpPr>
           <p:cNvPr id="2" name="Rectangle 1"/>
@@ -3604,6 +3616,7 @@
           <a:lstStyle/>
           <a:p>
             <a:pPr algn="ctr"/>
+            <a:endParaRPr/>
           </a:p>
         </p:txBody>
       </p:sp>
@@ -3624,7 +3637,7 @@
           <a:noFill/>
         </p:spPr>
         <p:txBody>
-          <a:bodyPr wrap="square" anchor="t" lIns="0" rIns="0" tIns="0" bIns="0">
+          <a:bodyPr wrap="square" lIns="0" tIns="0" rIns="0" bIns="0" anchor="t">
             <a:spAutoFit/>
           </a:bodyPr>
           <a:lstStyle/>
@@ -3669,7 +3682,7 @@
           <a:noFill/>
         </p:spPr>
         <p:txBody>
-          <a:bodyPr wrap="square" anchor="t" lIns="0" rIns="0" tIns="0" bIns="0">
+          <a:bodyPr wrap="square" lIns="0" tIns="0" rIns="0" bIns="0" anchor="t">
             <a:spAutoFit/>
           </a:bodyPr>
           <a:lstStyle/>
@@ -3801,7 +3814,7 @@
           <a:noFill/>
         </p:spPr>
         <p:txBody>
-          <a:bodyPr wrap="square" anchor="t" lIns="0" rIns="0" tIns="0" bIns="0">
+          <a:bodyPr wrap="square" lIns="0" tIns="0" rIns="0" bIns="0" anchor="t">
             <a:spAutoFit/>
           </a:bodyPr>
           <a:lstStyle/>
@@ -3846,7 +3859,7 @@
           <a:noFill/>
         </p:spPr>
         <p:txBody>
-          <a:bodyPr wrap="square" anchor="t" lIns="0" rIns="0" tIns="0" bIns="0">
+          <a:bodyPr wrap="square" lIns="0" tIns="0" rIns="0" bIns="0" anchor="t">
             <a:spAutoFit/>
           </a:bodyPr>
           <a:lstStyle/>
@@ -4017,6 +4030,7 @@
           <a:lstStyle/>
           <a:p>
             <a:pPr algn="ctr"/>
+            <a:endParaRPr/>
           </a:p>
         </p:txBody>
       </p:sp>
@@ -4061,6 +4075,7 @@
           <a:lstStyle/>
           <a:p>
             <a:pPr algn="ctr"/>
+            <a:endParaRPr/>
           </a:p>
         </p:txBody>
       </p:sp>
@@ -4081,7 +4096,7 @@
           <a:noFill/>
         </p:spPr>
         <p:txBody>
-          <a:bodyPr wrap="square" anchor="t" lIns="0" rIns="0" tIns="0" bIns="0">
+          <a:bodyPr wrap="square" lIns="0" tIns="0" rIns="0" bIns="0" anchor="t">
             <a:spAutoFit/>
           </a:bodyPr>
           <a:lstStyle/>
@@ -4184,7 +4199,7 @@
 </file>
 
 <file path=ppt/slides/slide11.xml><?xml version="1.0" encoding="utf-8"?>
-<p:sld xmlns:a="http://schemas.openxmlformats.org/drawingml/2006/main" xmlns:p="http://schemas.openxmlformats.org/presentationml/2006/main" xmlns:r="http://schemas.openxmlformats.org/officeDocument/2006/relationships">
+<p:sld xmlns:a="http://schemas.openxmlformats.org/drawingml/2006/main" xmlns:r="http://schemas.openxmlformats.org/officeDocument/2006/relationships" xmlns:p="http://schemas.openxmlformats.org/presentationml/2006/main">
   <p:cSld>
     <p:bg>
       <p:bgPr>
@@ -4200,7 +4215,14 @@
         <p:cNvGrpSpPr/>
         <p:nvPr/>
       </p:nvGrpSpPr>
-      <p:grpSpPr/>
+      <p:grpSpPr>
+        <a:xfrm>
+          <a:off x="0" y="0"/>
+          <a:ext cx="0" cy="0"/>
+          <a:chOff x="0" y="0"/>
+          <a:chExt cx="0" cy="0"/>
+        </a:xfrm>
+      </p:grpSpPr>
       <p:sp>
         <p:nvSpPr>
           <p:cNvPr id="2" name="Rectangle 1"/>
@@ -4242,6 +4264,7 @@
           <a:lstStyle/>
           <a:p>
             <a:pPr algn="ctr"/>
+            <a:endParaRPr/>
           </a:p>
         </p:txBody>
       </p:sp>
@@ -4262,7 +4285,7 @@
           <a:noFill/>
         </p:spPr>
         <p:txBody>
-          <a:bodyPr wrap="square" anchor="t" lIns="0" rIns="0" tIns="0" bIns="0">
+          <a:bodyPr wrap="square" lIns="0" tIns="0" rIns="0" bIns="0" anchor="t">
             <a:spAutoFit/>
           </a:bodyPr>
           <a:lstStyle/>
@@ -4307,7 +4330,7 @@
           <a:noFill/>
         </p:spPr>
         <p:txBody>
-          <a:bodyPr wrap="square" anchor="t" lIns="0" rIns="0" tIns="0" bIns="0">
+          <a:bodyPr wrap="square" lIns="0" tIns="0" rIns="0" bIns="0" anchor="t">
             <a:spAutoFit/>
           </a:bodyPr>
           <a:lstStyle/>
@@ -4439,7 +4462,7 @@
           <a:noFill/>
         </p:spPr>
         <p:txBody>
-          <a:bodyPr wrap="square" anchor="t" lIns="0" rIns="0" tIns="0" bIns="0">
+          <a:bodyPr wrap="square" lIns="0" tIns="0" rIns="0" bIns="0" anchor="t">
             <a:spAutoFit/>
           </a:bodyPr>
           <a:lstStyle/>
@@ -4484,7 +4507,7 @@
           <a:noFill/>
         </p:spPr>
         <p:txBody>
-          <a:bodyPr wrap="square" anchor="t" lIns="0" rIns="0" tIns="0" bIns="0">
+          <a:bodyPr wrap="square" lIns="0" tIns="0" rIns="0" bIns="0" anchor="t">
             <a:spAutoFit/>
           </a:bodyPr>
           <a:lstStyle/>
@@ -4655,6 +4678,7 @@
           <a:lstStyle/>
           <a:p>
             <a:pPr algn="ctr"/>
+            <a:endParaRPr/>
           </a:p>
         </p:txBody>
       </p:sp>
@@ -4699,6 +4723,7 @@
           <a:lstStyle/>
           <a:p>
             <a:pPr algn="ctr"/>
+            <a:endParaRPr/>
           </a:p>
         </p:txBody>
       </p:sp>
@@ -4719,7 +4744,7 @@
           <a:noFill/>
         </p:spPr>
         <p:txBody>
-          <a:bodyPr wrap="square" anchor="t" lIns="0" rIns="0" tIns="0" bIns="0">
+          <a:bodyPr wrap="square" lIns="0" tIns="0" rIns="0" bIns="0" anchor="t">
             <a:spAutoFit/>
           </a:bodyPr>
           <a:lstStyle/>
@@ -4822,7 +4847,7 @@
 </file>
 
 <file path=ppt/slides/slide12.xml><?xml version="1.0" encoding="utf-8"?>
-<p:sld xmlns:a="http://schemas.openxmlformats.org/drawingml/2006/main" xmlns:p="http://schemas.openxmlformats.org/presentationml/2006/main" xmlns:r="http://schemas.openxmlformats.org/officeDocument/2006/relationships">
+<p:sld xmlns:a="http://schemas.openxmlformats.org/drawingml/2006/main" xmlns:r="http://schemas.openxmlformats.org/officeDocument/2006/relationships" xmlns:p="http://schemas.openxmlformats.org/presentationml/2006/main">
   <p:cSld>
     <p:bg>
       <p:bgPr>
@@ -4838,7 +4863,14 @@
         <p:cNvGrpSpPr/>
         <p:nvPr/>
       </p:nvGrpSpPr>
-      <p:grpSpPr/>
+      <p:grpSpPr>
+        <a:xfrm>
+          <a:off x="0" y="0"/>
+          <a:ext cx="0" cy="0"/>
+          <a:chOff x="0" y="0"/>
+          <a:chExt cx="0" cy="0"/>
+        </a:xfrm>
+      </p:grpSpPr>
       <p:sp>
         <p:nvSpPr>
           <p:cNvPr id="2" name="Rectangle 1"/>
@@ -4880,6 +4912,7 @@
           <a:lstStyle/>
           <a:p>
             <a:pPr algn="ctr"/>
+            <a:endParaRPr/>
           </a:p>
         </p:txBody>
       </p:sp>
@@ -4900,7 +4933,7 @@
           <a:noFill/>
         </p:spPr>
         <p:txBody>
-          <a:bodyPr wrap="square" anchor="t" lIns="0" rIns="0" tIns="0" bIns="0">
+          <a:bodyPr wrap="square" lIns="0" tIns="0" rIns="0" bIns="0" anchor="t">
             <a:spAutoFit/>
           </a:bodyPr>
           <a:lstStyle/>
@@ -4945,7 +4978,7 @@
           <a:noFill/>
         </p:spPr>
         <p:txBody>
-          <a:bodyPr wrap="square" anchor="t" lIns="0" rIns="0" tIns="0" bIns="0">
+          <a:bodyPr wrap="square" lIns="0" tIns="0" rIns="0" bIns="0" anchor="t">
             <a:spAutoFit/>
           </a:bodyPr>
           <a:lstStyle/>
@@ -5077,7 +5110,7 @@
           <a:noFill/>
         </p:spPr>
         <p:txBody>
-          <a:bodyPr wrap="square" anchor="t" lIns="0" rIns="0" tIns="0" bIns="0">
+          <a:bodyPr wrap="square" lIns="0" tIns="0" rIns="0" bIns="0" anchor="t">
             <a:spAutoFit/>
           </a:bodyPr>
           <a:lstStyle/>
@@ -5122,7 +5155,7 @@
           <a:noFill/>
         </p:spPr>
         <p:txBody>
-          <a:bodyPr wrap="square" anchor="t" lIns="0" rIns="0" tIns="0" bIns="0">
+          <a:bodyPr wrap="square" lIns="0" tIns="0" rIns="0" bIns="0" anchor="t">
             <a:spAutoFit/>
           </a:bodyPr>
           <a:lstStyle/>
@@ -5247,7 +5280,7 @@
                 </a:solidFill>
                 <a:latin typeface="Calibri"/>
               </a:rPr>
-              <a:t>Additive to what you already run; takes no insurance liability</a:t>
+              <a:t>Additive to what you already run; live and producing in weeks.</a:t>
             </a:r>
           </a:p>
         </p:txBody>
@@ -5293,6 +5326,7 @@
           <a:lstStyle/>
           <a:p>
             <a:pPr algn="ctr"/>
+            <a:endParaRPr/>
           </a:p>
         </p:txBody>
       </p:sp>
@@ -5337,6 +5371,7 @@
           <a:lstStyle/>
           <a:p>
             <a:pPr algn="ctr"/>
+            <a:endParaRPr/>
           </a:p>
         </p:txBody>
       </p:sp>
@@ -5357,7 +5392,7 @@
           <a:noFill/>
         </p:spPr>
         <p:txBody>
-          <a:bodyPr wrap="square" anchor="t" lIns="0" rIns="0" tIns="0" bIns="0">
+          <a:bodyPr wrap="square" lIns="0" tIns="0" rIns="0" bIns="0" anchor="t">
             <a:spAutoFit/>
           </a:bodyPr>
           <a:lstStyle/>
@@ -5460,7 +5495,7 @@
 </file>
 
 <file path=ppt/slides/slide13.xml><?xml version="1.0" encoding="utf-8"?>
-<p:sld xmlns:a="http://schemas.openxmlformats.org/drawingml/2006/main" xmlns:p="http://schemas.openxmlformats.org/presentationml/2006/main" xmlns:r="http://schemas.openxmlformats.org/officeDocument/2006/relationships">
+<p:sld xmlns:a="http://schemas.openxmlformats.org/drawingml/2006/main" xmlns:r="http://schemas.openxmlformats.org/officeDocument/2006/relationships" xmlns:p="http://schemas.openxmlformats.org/presentationml/2006/main">
   <p:cSld>
     <p:bg>
       <p:bgPr>
@@ -5476,7 +5511,14 @@
         <p:cNvGrpSpPr/>
         <p:nvPr/>
       </p:nvGrpSpPr>
-      <p:grpSpPr/>
+      <p:grpSpPr>
+        <a:xfrm>
+          <a:off x="0" y="0"/>
+          <a:ext cx="0" cy="0"/>
+          <a:chOff x="0" y="0"/>
+          <a:chExt cx="0" cy="0"/>
+        </a:xfrm>
+      </p:grpSpPr>
       <p:sp>
         <p:nvSpPr>
           <p:cNvPr id="2" name="Rectangle 1"/>
@@ -5518,6 +5560,7 @@
           <a:lstStyle/>
           <a:p>
             <a:pPr algn="ctr"/>
+            <a:endParaRPr/>
           </a:p>
         </p:txBody>
       </p:sp>
@@ -5538,7 +5581,7 @@
           <a:noFill/>
         </p:spPr>
         <p:txBody>
-          <a:bodyPr wrap="square" anchor="t" lIns="0" rIns="0" tIns="0" bIns="0">
+          <a:bodyPr wrap="square" lIns="0" tIns="0" rIns="0" bIns="0" anchor="t">
             <a:spAutoFit/>
           </a:bodyPr>
           <a:lstStyle/>
@@ -5583,7 +5626,7 @@
           <a:noFill/>
         </p:spPr>
         <p:txBody>
-          <a:bodyPr wrap="square" anchor="t" lIns="0" rIns="0" tIns="0" bIns="0">
+          <a:bodyPr wrap="square" lIns="0" tIns="0" rIns="0" bIns="0" anchor="t">
             <a:spAutoFit/>
           </a:bodyPr>
           <a:lstStyle/>
@@ -5652,6 +5695,7 @@
           <a:lstStyle/>
           <a:p>
             <a:pPr algn="ctr"/>
+            <a:endParaRPr/>
           </a:p>
         </p:txBody>
       </p:sp>
@@ -5696,6 +5740,7 @@
           <a:lstStyle/>
           <a:p>
             <a:pPr algn="ctr"/>
+            <a:endParaRPr/>
           </a:p>
         </p:txBody>
       </p:sp>
@@ -5716,7 +5761,7 @@
           <a:noFill/>
         </p:spPr>
         <p:txBody>
-          <a:bodyPr wrap="square" anchor="t" lIns="0" rIns="0" tIns="0" bIns="0">
+          <a:bodyPr wrap="square" lIns="0" tIns="0" rIns="0" bIns="0" anchor="t">
             <a:spAutoFit/>
           </a:bodyPr>
           <a:lstStyle/>
@@ -5829,6 +5874,7 @@
           <a:lstStyle/>
           <a:p>
             <a:pPr algn="ctr"/>
+            <a:endParaRPr/>
           </a:p>
         </p:txBody>
       </p:sp>
@@ -5873,6 +5919,7 @@
           <a:lstStyle/>
           <a:p>
             <a:pPr algn="ctr"/>
+            <a:endParaRPr/>
           </a:p>
         </p:txBody>
       </p:sp>
@@ -5893,7 +5940,7 @@
           <a:noFill/>
         </p:spPr>
         <p:txBody>
-          <a:bodyPr wrap="square" anchor="t" lIns="0" rIns="0" tIns="0" bIns="0">
+          <a:bodyPr wrap="square" lIns="0" tIns="0" rIns="0" bIns="0" anchor="t">
             <a:spAutoFit/>
           </a:bodyPr>
           <a:lstStyle/>
@@ -6006,6 +6053,7 @@
           <a:lstStyle/>
           <a:p>
             <a:pPr algn="ctr"/>
+            <a:endParaRPr/>
           </a:p>
         </p:txBody>
       </p:sp>
@@ -6050,6 +6098,7 @@
           <a:lstStyle/>
           <a:p>
             <a:pPr algn="ctr"/>
+            <a:endParaRPr/>
           </a:p>
         </p:txBody>
       </p:sp>
@@ -6070,7 +6119,7 @@
           <a:noFill/>
         </p:spPr>
         <p:txBody>
-          <a:bodyPr wrap="square" anchor="t" lIns="0" rIns="0" tIns="0" bIns="0">
+          <a:bodyPr wrap="square" lIns="0" tIns="0" rIns="0" bIns="0" anchor="t">
             <a:spAutoFit/>
           </a:bodyPr>
           <a:lstStyle/>
@@ -6183,6 +6232,7 @@
           <a:lstStyle/>
           <a:p>
             <a:pPr algn="ctr"/>
+            <a:endParaRPr/>
           </a:p>
         </p:txBody>
       </p:sp>
@@ -6227,6 +6277,7 @@
           <a:lstStyle/>
           <a:p>
             <a:pPr algn="ctr"/>
+            <a:endParaRPr/>
           </a:p>
         </p:txBody>
       </p:sp>
@@ -6247,7 +6298,7 @@
           <a:noFill/>
         </p:spPr>
         <p:txBody>
-          <a:bodyPr wrap="square" anchor="t" lIns="0" rIns="0" tIns="0" bIns="0">
+          <a:bodyPr wrap="square" lIns="0" tIns="0" rIns="0" bIns="0" anchor="t">
             <a:spAutoFit/>
           </a:bodyPr>
           <a:lstStyle/>
@@ -6360,6 +6411,7 @@
           <a:lstStyle/>
           <a:p>
             <a:pPr algn="ctr"/>
+            <a:endParaRPr/>
           </a:p>
         </p:txBody>
       </p:sp>
@@ -6380,7 +6432,7 @@
           <a:noFill/>
         </p:spPr>
         <p:txBody>
-          <a:bodyPr wrap="square" anchor="t" lIns="0" rIns="0" tIns="0" bIns="0">
+          <a:bodyPr wrap="square" lIns="0" tIns="0" rIns="0" bIns="0" anchor="t">
             <a:spAutoFit/>
           </a:bodyPr>
           <a:lstStyle/>
@@ -6403,7 +6455,7 @@
                 </a:solidFill>
                 <a:latin typeface="Cambria"/>
               </a:rPr>
-              <a:t>The tech disappears. The results don't.</a:t>
+              <a:t>Technology made simple. Growth made exponential.</a:t>
             </a:r>
           </a:p>
           <a:p>
@@ -6526,7 +6578,7 @@
 </file>
 
 <file path=ppt/slides/slide2.xml><?xml version="1.0" encoding="utf-8"?>
-<p:sld xmlns:a="http://schemas.openxmlformats.org/drawingml/2006/main" xmlns:p="http://schemas.openxmlformats.org/presentationml/2006/main" xmlns:r="http://schemas.openxmlformats.org/officeDocument/2006/relationships">
+<p:sld xmlns:a="http://schemas.openxmlformats.org/drawingml/2006/main" xmlns:r="http://schemas.openxmlformats.org/officeDocument/2006/relationships" xmlns:p="http://schemas.openxmlformats.org/presentationml/2006/main">
   <p:cSld>
     <p:bg>
       <p:bgPr>
@@ -6542,7 +6594,14 @@
         <p:cNvGrpSpPr/>
         <p:nvPr/>
       </p:nvGrpSpPr>
-      <p:grpSpPr/>
+      <p:grpSpPr>
+        <a:xfrm>
+          <a:off x="0" y="0"/>
+          <a:ext cx="0" cy="0"/>
+          <a:chOff x="0" y="0"/>
+          <a:chExt cx="0" cy="0"/>
+        </a:xfrm>
+      </p:grpSpPr>
       <p:sp>
         <p:nvSpPr>
           <p:cNvPr id="2" name="Rectangle 1"/>
@@ -6584,6 +6643,7 @@
           <a:lstStyle/>
           <a:p>
             <a:pPr algn="ctr"/>
+            <a:endParaRPr/>
           </a:p>
         </p:txBody>
       </p:sp>
@@ -6604,7 +6664,7 @@
           <a:noFill/>
         </p:spPr>
         <p:txBody>
-          <a:bodyPr wrap="square" anchor="t" lIns="0" rIns="0" tIns="0" bIns="0">
+          <a:bodyPr wrap="square" lIns="0" tIns="0" rIns="0" bIns="0" anchor="t">
             <a:spAutoFit/>
           </a:bodyPr>
           <a:lstStyle/>
@@ -6649,7 +6709,7 @@
           <a:noFill/>
         </p:spPr>
         <p:txBody>
-          <a:bodyPr wrap="square" anchor="t" lIns="0" rIns="0" tIns="0" bIns="0">
+          <a:bodyPr wrap="square" lIns="0" tIns="0" rIns="0" bIns="0" anchor="t">
             <a:spAutoFit/>
           </a:bodyPr>
           <a:lstStyle/>
@@ -6803,7 +6863,7 @@
           <a:noFill/>
         </p:spPr>
         <p:txBody>
-          <a:bodyPr wrap="square" anchor="t" lIns="0" rIns="0" tIns="0" bIns="0">
+          <a:bodyPr wrap="square" lIns="0" tIns="0" rIns="0" bIns="0" anchor="t">
             <a:spAutoFit/>
           </a:bodyPr>
           <a:lstStyle/>
@@ -6938,6 +6998,7 @@
           <a:lstStyle/>
           <a:p>
             <a:pPr algn="ctr"/>
+            <a:endParaRPr/>
           </a:p>
         </p:txBody>
       </p:sp>
@@ -6982,6 +7043,7 @@
           <a:lstStyle/>
           <a:p>
             <a:pPr algn="ctr"/>
+            <a:endParaRPr/>
           </a:p>
         </p:txBody>
       </p:sp>
@@ -7002,7 +7064,7 @@
           <a:noFill/>
         </p:spPr>
         <p:txBody>
-          <a:bodyPr wrap="square" anchor="t" lIns="0" rIns="0" tIns="0" bIns="0">
+          <a:bodyPr wrap="square" lIns="0" tIns="0" rIns="0" bIns="0" anchor="t">
             <a:spAutoFit/>
           </a:bodyPr>
           <a:lstStyle/>
@@ -7091,7 +7153,7 @@
                 </a:solidFill>
                 <a:latin typeface="Calibri"/>
               </a:rPr>
-              <a:t>It takes no insurance liability and is additive to what you already run.</a:t>
+              <a:t>It's additive to everything you already run — not a rip-and-replace.</a:t>
             </a:r>
           </a:p>
         </p:txBody>
@@ -7105,7 +7167,7 @@
 </file>
 
 <file path=ppt/slides/slide3.xml><?xml version="1.0" encoding="utf-8"?>
-<p:sld xmlns:a="http://schemas.openxmlformats.org/drawingml/2006/main" xmlns:p="http://schemas.openxmlformats.org/presentationml/2006/main" xmlns:r="http://schemas.openxmlformats.org/officeDocument/2006/relationships">
+<p:sld xmlns:a="http://schemas.openxmlformats.org/drawingml/2006/main" xmlns:r="http://schemas.openxmlformats.org/officeDocument/2006/relationships" xmlns:p="http://schemas.openxmlformats.org/presentationml/2006/main">
   <p:cSld>
     <p:bg>
       <p:bgPr>
@@ -7121,7 +7183,14 @@
         <p:cNvGrpSpPr/>
         <p:nvPr/>
       </p:nvGrpSpPr>
-      <p:grpSpPr/>
+      <p:grpSpPr>
+        <a:xfrm>
+          <a:off x="0" y="0"/>
+          <a:ext cx="0" cy="0"/>
+          <a:chOff x="0" y="0"/>
+          <a:chExt cx="0" cy="0"/>
+        </a:xfrm>
+      </p:grpSpPr>
       <p:sp>
         <p:nvSpPr>
           <p:cNvPr id="2" name="Rectangle 1"/>
@@ -7163,6 +7232,7 @@
           <a:lstStyle/>
           <a:p>
             <a:pPr algn="ctr"/>
+            <a:endParaRPr/>
           </a:p>
         </p:txBody>
       </p:sp>
@@ -7183,7 +7253,7 @@
           <a:noFill/>
         </p:spPr>
         <p:txBody>
-          <a:bodyPr wrap="square" anchor="t" lIns="0" rIns="0" tIns="0" bIns="0">
+          <a:bodyPr wrap="square" lIns="0" tIns="0" rIns="0" bIns="0" anchor="t">
             <a:spAutoFit/>
           </a:bodyPr>
           <a:lstStyle/>
@@ -7228,7 +7298,7 @@
           <a:noFill/>
         </p:spPr>
         <p:txBody>
-          <a:bodyPr wrap="square" anchor="t" lIns="0" rIns="0" tIns="0" bIns="0">
+          <a:bodyPr wrap="square" lIns="0" tIns="0" rIns="0" bIns="0" anchor="t">
             <a:spAutoFit/>
           </a:bodyPr>
           <a:lstStyle/>
@@ -7384,6 +7454,7 @@
           <a:lstStyle/>
           <a:p>
             <a:pPr algn="ctr"/>
+            <a:endParaRPr/>
           </a:p>
         </p:txBody>
       </p:sp>
@@ -7428,6 +7499,7 @@
           <a:lstStyle/>
           <a:p>
             <a:pPr algn="ctr"/>
+            <a:endParaRPr/>
           </a:p>
         </p:txBody>
       </p:sp>
@@ -7448,7 +7520,7 @@
           <a:noFill/>
         </p:spPr>
         <p:txBody>
-          <a:bodyPr wrap="square" anchor="t" lIns="0" rIns="0" tIns="0" bIns="0">
+          <a:bodyPr wrap="square" lIns="0" tIns="0" rIns="0" bIns="0" anchor="t">
             <a:spAutoFit/>
           </a:bodyPr>
           <a:lstStyle/>
@@ -7539,6 +7611,7 @@
           <a:lstStyle/>
           <a:p>
             <a:pPr algn="ctr"/>
+            <a:endParaRPr/>
           </a:p>
         </p:txBody>
       </p:sp>
@@ -7583,6 +7656,7 @@
           <a:lstStyle/>
           <a:p>
             <a:pPr algn="ctr"/>
+            <a:endParaRPr/>
           </a:p>
         </p:txBody>
       </p:sp>
@@ -7603,7 +7677,7 @@
           <a:noFill/>
         </p:spPr>
         <p:txBody>
-          <a:bodyPr wrap="square" anchor="t" lIns="0" rIns="0" tIns="0" bIns="0">
+          <a:bodyPr wrap="square" lIns="0" tIns="0" rIns="0" bIns="0" anchor="t">
             <a:spAutoFit/>
           </a:bodyPr>
           <a:lstStyle/>
@@ -7694,6 +7768,7 @@
           <a:lstStyle/>
           <a:p>
             <a:pPr algn="ctr"/>
+            <a:endParaRPr/>
           </a:p>
         </p:txBody>
       </p:sp>
@@ -7738,6 +7813,7 @@
           <a:lstStyle/>
           <a:p>
             <a:pPr algn="ctr"/>
+            <a:endParaRPr/>
           </a:p>
         </p:txBody>
       </p:sp>
@@ -7758,7 +7834,7 @@
           <a:noFill/>
         </p:spPr>
         <p:txBody>
-          <a:bodyPr wrap="square" anchor="t" lIns="0" rIns="0" tIns="0" bIns="0">
+          <a:bodyPr wrap="square" lIns="0" tIns="0" rIns="0" bIns="0" anchor="t">
             <a:spAutoFit/>
           </a:bodyPr>
           <a:lstStyle/>
@@ -7849,6 +7925,7 @@
           <a:lstStyle/>
           <a:p>
             <a:pPr algn="ctr"/>
+            <a:endParaRPr/>
           </a:p>
         </p:txBody>
       </p:sp>
@@ -7893,6 +7970,7 @@
           <a:lstStyle/>
           <a:p>
             <a:pPr algn="ctr"/>
+            <a:endParaRPr/>
           </a:p>
         </p:txBody>
       </p:sp>
@@ -7913,7 +7991,7 @@
           <a:noFill/>
         </p:spPr>
         <p:txBody>
-          <a:bodyPr wrap="square" anchor="t" lIns="0" rIns="0" tIns="0" bIns="0">
+          <a:bodyPr wrap="square" lIns="0" tIns="0" rIns="0" bIns="0" anchor="t">
             <a:spAutoFit/>
           </a:bodyPr>
           <a:lstStyle/>
@@ -8004,6 +8082,7 @@
           <a:lstStyle/>
           <a:p>
             <a:pPr algn="ctr"/>
+            <a:endParaRPr/>
           </a:p>
         </p:txBody>
       </p:sp>
@@ -8048,6 +8127,7 @@
           <a:lstStyle/>
           <a:p>
             <a:pPr algn="ctr"/>
+            <a:endParaRPr/>
           </a:p>
         </p:txBody>
       </p:sp>
@@ -8068,7 +8148,7 @@
           <a:noFill/>
         </p:spPr>
         <p:txBody>
-          <a:bodyPr wrap="square" anchor="ctr" lIns="0" rIns="0" tIns="0" bIns="0">
+          <a:bodyPr wrap="square" lIns="0" tIns="0" rIns="0" bIns="0" anchor="ctr">
             <a:spAutoFit/>
           </a:bodyPr>
           <a:lstStyle/>
@@ -8105,7 +8185,7 @@
 </file>
 
 <file path=ppt/slides/slide4.xml><?xml version="1.0" encoding="utf-8"?>
-<p:sld xmlns:a="http://schemas.openxmlformats.org/drawingml/2006/main" xmlns:p="http://schemas.openxmlformats.org/presentationml/2006/main" xmlns:r="http://schemas.openxmlformats.org/officeDocument/2006/relationships">
+<p:sld xmlns:a="http://schemas.openxmlformats.org/drawingml/2006/main" xmlns:r="http://schemas.openxmlformats.org/officeDocument/2006/relationships" xmlns:p="http://schemas.openxmlformats.org/presentationml/2006/main">
   <p:cSld>
     <p:bg>
       <p:bgPr>
@@ -8121,7 +8201,14 @@
         <p:cNvGrpSpPr/>
         <p:nvPr/>
       </p:nvGrpSpPr>
-      <p:grpSpPr/>
+      <p:grpSpPr>
+        <a:xfrm>
+          <a:off x="0" y="0"/>
+          <a:ext cx="0" cy="0"/>
+          <a:chOff x="0" y="0"/>
+          <a:chExt cx="0" cy="0"/>
+        </a:xfrm>
+      </p:grpSpPr>
       <p:sp>
         <p:nvSpPr>
           <p:cNvPr id="2" name="Rectangle 1"/>
@@ -8163,6 +8250,7 @@
           <a:lstStyle/>
           <a:p>
             <a:pPr algn="ctr"/>
+            <a:endParaRPr/>
           </a:p>
         </p:txBody>
       </p:sp>
@@ -8183,7 +8271,7 @@
           <a:noFill/>
         </p:spPr>
         <p:txBody>
-          <a:bodyPr wrap="square" anchor="t" lIns="0" rIns="0" tIns="0" bIns="0">
+          <a:bodyPr wrap="square" lIns="0" tIns="0" rIns="0" bIns="0" anchor="t">
             <a:spAutoFit/>
           </a:bodyPr>
           <a:lstStyle/>
@@ -8228,7 +8316,7 @@
           <a:noFill/>
         </p:spPr>
         <p:txBody>
-          <a:bodyPr wrap="square" anchor="t" lIns="0" rIns="0" tIns="0" bIns="0">
+          <a:bodyPr wrap="square" lIns="0" tIns="0" rIns="0" bIns="0" anchor="t">
             <a:spAutoFit/>
           </a:bodyPr>
           <a:lstStyle/>
@@ -8384,6 +8472,7 @@
           <a:lstStyle/>
           <a:p>
             <a:pPr algn="ctr"/>
+            <a:endParaRPr/>
           </a:p>
         </p:txBody>
       </p:sp>
@@ -8428,6 +8517,7 @@
           <a:lstStyle/>
           <a:p>
             <a:pPr algn="ctr"/>
+            <a:endParaRPr/>
           </a:p>
         </p:txBody>
       </p:sp>
@@ -8448,7 +8538,7 @@
           <a:noFill/>
         </p:spPr>
         <p:txBody>
-          <a:bodyPr wrap="square" anchor="t" lIns="0" rIns="0" tIns="0" bIns="0">
+          <a:bodyPr wrap="square" lIns="0" tIns="0" rIns="0" bIns="0" anchor="t">
             <a:spAutoFit/>
           </a:bodyPr>
           <a:lstStyle/>
@@ -8515,7 +8605,7 @@
                 </a:solidFill>
                 <a:latin typeface="Calibri"/>
               </a:rPr>
-              <a:t>The configurability engine. Your operations team configures products, underwriting rules, screens, questions, and API calls through a drag-and-drop studio. No code. Sandbox to production in minutes.</a:t>
+              <a:t>The configurability engine. Your business team configures products, underwriting rules, screens, questions, and API calls through a drag-and-drop studio. No code. Sandbox to production in minutes.</a:t>
             </a:r>
           </a:p>
         </p:txBody>
@@ -8561,6 +8651,7 @@
           <a:lstStyle/>
           <a:p>
             <a:pPr algn="ctr"/>
+            <a:endParaRPr/>
           </a:p>
         </p:txBody>
       </p:sp>
@@ -8605,6 +8696,7 @@
           <a:lstStyle/>
           <a:p>
             <a:pPr algn="ctr"/>
+            <a:endParaRPr/>
           </a:p>
         </p:txBody>
       </p:sp>
@@ -8625,7 +8717,7 @@
           <a:noFill/>
         </p:spPr>
         <p:txBody>
-          <a:bodyPr wrap="square" anchor="t" lIns="0" rIns="0" tIns="0" bIns="0">
+          <a:bodyPr wrap="square" lIns="0" tIns="0" rIns="0" bIns="0" anchor="t">
             <a:spAutoFit/>
           </a:bodyPr>
           <a:lstStyle/>
@@ -8738,6 +8830,7 @@
           <a:lstStyle/>
           <a:p>
             <a:pPr algn="ctr"/>
+            <a:endParaRPr/>
           </a:p>
         </p:txBody>
       </p:sp>
@@ -8782,6 +8875,7 @@
           <a:lstStyle/>
           <a:p>
             <a:pPr algn="ctr"/>
+            <a:endParaRPr/>
           </a:p>
         </p:txBody>
       </p:sp>
@@ -8802,7 +8896,7 @@
           <a:noFill/>
         </p:spPr>
         <p:txBody>
-          <a:bodyPr wrap="square" anchor="t" lIns="0" rIns="0" tIns="0" bIns="0">
+          <a:bodyPr wrap="square" lIns="0" tIns="0" rIns="0" bIns="0" anchor="t">
             <a:spAutoFit/>
           </a:bodyPr>
           <a:lstStyle/>
@@ -8915,6 +9009,7 @@
           <a:lstStyle/>
           <a:p>
             <a:pPr algn="ctr"/>
+            <a:endParaRPr/>
           </a:p>
         </p:txBody>
       </p:sp>
@@ -8959,6 +9054,7 @@
           <a:lstStyle/>
           <a:p>
             <a:pPr algn="ctr"/>
+            <a:endParaRPr/>
           </a:p>
         </p:txBody>
       </p:sp>
@@ -8979,7 +9075,7 @@
           <a:noFill/>
         </p:spPr>
         <p:txBody>
-          <a:bodyPr wrap="square" anchor="ctr" lIns="0" rIns="0" tIns="0" bIns="0">
+          <a:bodyPr wrap="square" lIns="0" tIns="0" rIns="0" bIns="0" anchor="ctr">
             <a:spAutoFit/>
           </a:bodyPr>
           <a:lstStyle/>
@@ -9016,7 +9112,7 @@
 </file>
 
 <file path=ppt/slides/slide5.xml><?xml version="1.0" encoding="utf-8"?>
-<p:sld xmlns:a="http://schemas.openxmlformats.org/drawingml/2006/main" xmlns:p="http://schemas.openxmlformats.org/presentationml/2006/main" xmlns:r="http://schemas.openxmlformats.org/officeDocument/2006/relationships">
+<p:sld xmlns:a="http://schemas.openxmlformats.org/drawingml/2006/main" xmlns:r="http://schemas.openxmlformats.org/officeDocument/2006/relationships" xmlns:p="http://schemas.openxmlformats.org/presentationml/2006/main">
   <p:cSld>
     <p:bg>
       <p:bgPr>
@@ -9032,7 +9128,14 @@
         <p:cNvGrpSpPr/>
         <p:nvPr/>
       </p:nvGrpSpPr>
-      <p:grpSpPr/>
+      <p:grpSpPr>
+        <a:xfrm>
+          <a:off x="0" y="0"/>
+          <a:ext cx="0" cy="0"/>
+          <a:chOff x="0" y="0"/>
+          <a:chExt cx="0" cy="0"/>
+        </a:xfrm>
+      </p:grpSpPr>
       <p:sp>
         <p:nvSpPr>
           <p:cNvPr id="2" name="Rectangle 1"/>
@@ -9074,6 +9177,7 @@
           <a:lstStyle/>
           <a:p>
             <a:pPr algn="ctr"/>
+            <a:endParaRPr/>
           </a:p>
         </p:txBody>
       </p:sp>
@@ -9094,7 +9198,7 @@
           <a:noFill/>
         </p:spPr>
         <p:txBody>
-          <a:bodyPr wrap="square" anchor="t" lIns="0" rIns="0" tIns="0" bIns="0">
+          <a:bodyPr wrap="square" lIns="0" tIns="0" rIns="0" bIns="0" anchor="t">
             <a:spAutoFit/>
           </a:bodyPr>
           <a:lstStyle/>
@@ -9139,7 +9243,7 @@
           <a:noFill/>
         </p:spPr>
         <p:txBody>
-          <a:bodyPr wrap="square" anchor="t" lIns="0" rIns="0" tIns="0" bIns="0">
+          <a:bodyPr wrap="square" lIns="0" tIns="0" rIns="0" bIns="0" anchor="t">
             <a:spAutoFit/>
           </a:bodyPr>
           <a:lstStyle/>
@@ -9295,6 +9399,7 @@
           <a:lstStyle/>
           <a:p>
             <a:pPr algn="ctr"/>
+            <a:endParaRPr/>
           </a:p>
         </p:txBody>
       </p:sp>
@@ -9315,7 +9420,7 @@
           <a:noFill/>
         </p:spPr>
         <p:txBody>
-          <a:bodyPr wrap="square" anchor="t" lIns="0" rIns="0" tIns="0" bIns="0">
+          <a:bodyPr wrap="square" lIns="0" tIns="0" rIns="0" bIns="0" anchor="t">
             <a:spAutoFit/>
           </a:bodyPr>
           <a:lstStyle/>
@@ -9428,6 +9533,7 @@
           <a:lstStyle/>
           <a:p>
             <a:pPr algn="ctr"/>
+            <a:endParaRPr/>
           </a:p>
         </p:txBody>
       </p:sp>
@@ -9448,7 +9554,7 @@
           <a:noFill/>
         </p:spPr>
         <p:txBody>
-          <a:bodyPr wrap="square" anchor="t" lIns="0" rIns="0" tIns="0" bIns="0">
+          <a:bodyPr wrap="square" lIns="0" tIns="0" rIns="0" bIns="0" anchor="t">
             <a:spAutoFit/>
           </a:bodyPr>
           <a:lstStyle/>
@@ -9515,7 +9621,7 @@
                 </a:solidFill>
                 <a:latin typeface="Calibri"/>
               </a:rPr>
-              <a:t>In Orchestrator — a studio designed for operations people, not developers. Click, drag, save.</a:t>
+              <a:t>In Orchestrator — a studio designed for business teams, not developers. Click, drag, save.</a:t>
             </a:r>
           </a:p>
         </p:txBody>
@@ -9561,6 +9667,7 @@
           <a:lstStyle/>
           <a:p>
             <a:pPr algn="ctr"/>
+            <a:endParaRPr/>
           </a:p>
         </p:txBody>
       </p:sp>
@@ -9581,7 +9688,7 @@
           <a:noFill/>
         </p:spPr>
         <p:txBody>
-          <a:bodyPr wrap="square" anchor="t" lIns="0" rIns="0" tIns="0" bIns="0">
+          <a:bodyPr wrap="square" lIns="0" tIns="0" rIns="0" bIns="0" anchor="t">
             <a:spAutoFit/>
           </a:bodyPr>
           <a:lstStyle/>
@@ -9694,6 +9801,7 @@
           <a:lstStyle/>
           <a:p>
             <a:pPr algn="ctr"/>
+            <a:endParaRPr/>
           </a:p>
         </p:txBody>
       </p:sp>
@@ -9714,7 +9822,7 @@
           <a:noFill/>
         </p:spPr>
         <p:txBody>
-          <a:bodyPr wrap="square" anchor="t" lIns="0" rIns="0" tIns="0" bIns="0">
+          <a:bodyPr wrap="square" lIns="0" tIns="0" rIns="0" bIns="0" anchor="t">
             <a:spAutoFit/>
           </a:bodyPr>
           <a:lstStyle/>
@@ -9803,7 +9911,7 @@
           <a:noFill/>
         </p:spPr>
         <p:txBody>
-          <a:bodyPr wrap="square" anchor="t" lIns="0" rIns="0" tIns="0" bIns="0">
+          <a:bodyPr wrap="square" lIns="0" tIns="0" rIns="0" bIns="0" anchor="t">
             <a:spAutoFit/>
           </a:bodyPr>
           <a:lstStyle/>
@@ -9840,7 +9948,7 @@
 </file>
 
 <file path=ppt/slides/slide6.xml><?xml version="1.0" encoding="utf-8"?>
-<p:sld xmlns:a="http://schemas.openxmlformats.org/drawingml/2006/main" xmlns:p="http://schemas.openxmlformats.org/presentationml/2006/main" xmlns:r="http://schemas.openxmlformats.org/officeDocument/2006/relationships">
+<p:sld xmlns:a="http://schemas.openxmlformats.org/drawingml/2006/main" xmlns:r="http://schemas.openxmlformats.org/officeDocument/2006/relationships" xmlns:p="http://schemas.openxmlformats.org/presentationml/2006/main">
   <p:cSld>
     <p:bg>
       <p:bgPr>
@@ -9856,7 +9964,14 @@
         <p:cNvGrpSpPr/>
         <p:nvPr/>
       </p:nvGrpSpPr>
-      <p:grpSpPr/>
+      <p:grpSpPr>
+        <a:xfrm>
+          <a:off x="0" y="0"/>
+          <a:ext cx="0" cy="0"/>
+          <a:chOff x="0" y="0"/>
+          <a:chExt cx="0" cy="0"/>
+        </a:xfrm>
+      </p:grpSpPr>
       <p:sp>
         <p:nvSpPr>
           <p:cNvPr id="2" name="Rectangle 1"/>
@@ -9898,6 +10013,7 @@
           <a:lstStyle/>
           <a:p>
             <a:pPr algn="ctr"/>
+            <a:endParaRPr/>
           </a:p>
         </p:txBody>
       </p:sp>
@@ -9918,7 +10034,7 @@
           <a:noFill/>
         </p:spPr>
         <p:txBody>
-          <a:bodyPr wrap="square" anchor="t" lIns="0" rIns="0" tIns="0" bIns="0">
+          <a:bodyPr wrap="square" lIns="0" tIns="0" rIns="0" bIns="0" anchor="t">
             <a:spAutoFit/>
           </a:bodyPr>
           <a:lstStyle/>
@@ -9963,7 +10079,7 @@
           <a:noFill/>
         </p:spPr>
         <p:txBody>
-          <a:bodyPr wrap="square" anchor="t" lIns="0" rIns="0" tIns="0" bIns="0">
+          <a:bodyPr wrap="square" lIns="0" tIns="0" rIns="0" bIns="0" anchor="t">
             <a:spAutoFit/>
           </a:bodyPr>
           <a:lstStyle/>
@@ -10008,7 +10124,7 @@
           <a:noFill/>
         </p:spPr>
         <p:txBody>
-          <a:bodyPr wrap="square" anchor="t" lIns="0" rIns="0" tIns="0" bIns="0">
+          <a:bodyPr wrap="square" lIns="0" tIns="0" rIns="0" bIns="0" anchor="t">
             <a:spAutoFit/>
           </a:bodyPr>
           <a:lstStyle/>
@@ -10053,7 +10169,7 @@
           <a:noFill/>
         </p:spPr>
         <p:txBody>
-          <a:bodyPr wrap="square" anchor="t" lIns="0" rIns="0" tIns="0" bIns="0">
+          <a:bodyPr wrap="square" lIns="0" tIns="0" rIns="0" bIns="0" anchor="t">
             <a:spAutoFit/>
           </a:bodyPr>
           <a:lstStyle/>
@@ -10120,7 +10236,7 @@
           <a:noFill/>
         </p:spPr>
         <p:txBody>
-          <a:bodyPr wrap="square" anchor="t" lIns="0" rIns="0" tIns="0" bIns="0">
+          <a:bodyPr wrap="square" lIns="0" tIns="0" rIns="0" bIns="0" anchor="t">
             <a:spAutoFit/>
           </a:bodyPr>
           <a:lstStyle/>
@@ -10187,7 +10303,7 @@
           <a:noFill/>
         </p:spPr>
         <p:txBody>
-          <a:bodyPr wrap="square" anchor="t" lIns="0" rIns="0" tIns="0" bIns="0">
+          <a:bodyPr wrap="square" lIns="0" tIns="0" rIns="0" bIns="0" anchor="t">
             <a:spAutoFit/>
           </a:bodyPr>
           <a:lstStyle/>
@@ -10254,7 +10370,7 @@
           <a:noFill/>
         </p:spPr>
         <p:txBody>
-          <a:bodyPr wrap="square" anchor="t" lIns="0" rIns="0" tIns="0" bIns="0">
+          <a:bodyPr wrap="square" lIns="0" tIns="0" rIns="0" bIns="0" anchor="t">
             <a:spAutoFit/>
           </a:bodyPr>
           <a:lstStyle/>
@@ -10345,6 +10461,7 @@
           <a:lstStyle/>
           <a:p>
             <a:pPr algn="ctr"/>
+            <a:endParaRPr/>
           </a:p>
         </p:txBody>
       </p:sp>
@@ -10389,6 +10506,7 @@
           <a:lstStyle/>
           <a:p>
             <a:pPr algn="ctr"/>
+            <a:endParaRPr/>
           </a:p>
         </p:txBody>
       </p:sp>
@@ -10409,7 +10527,7 @@
           <a:noFill/>
         </p:spPr>
         <p:txBody>
-          <a:bodyPr wrap="square" anchor="t" lIns="0" rIns="0" tIns="0" bIns="0">
+          <a:bodyPr wrap="square" lIns="0" tIns="0" rIns="0" bIns="0" anchor="t">
             <a:spAutoFit/>
           </a:bodyPr>
           <a:lstStyle/>
@@ -10555,7 +10673,7 @@
 </file>
 
 <file path=ppt/slides/slide7.xml><?xml version="1.0" encoding="utf-8"?>
-<p:sld xmlns:a="http://schemas.openxmlformats.org/drawingml/2006/main" xmlns:p="http://schemas.openxmlformats.org/presentationml/2006/main" xmlns:r="http://schemas.openxmlformats.org/officeDocument/2006/relationships">
+<p:sld xmlns:a="http://schemas.openxmlformats.org/drawingml/2006/main" xmlns:r="http://schemas.openxmlformats.org/officeDocument/2006/relationships" xmlns:p="http://schemas.openxmlformats.org/presentationml/2006/main">
   <p:cSld>
     <p:bg>
       <p:bgPr>
@@ -10571,7 +10689,14 @@
         <p:cNvGrpSpPr/>
         <p:nvPr/>
       </p:nvGrpSpPr>
-      <p:grpSpPr/>
+      <p:grpSpPr>
+        <a:xfrm>
+          <a:off x="0" y="0"/>
+          <a:ext cx="0" cy="0"/>
+          <a:chOff x="0" y="0"/>
+          <a:chExt cx="0" cy="0"/>
+        </a:xfrm>
+      </p:grpSpPr>
       <p:sp>
         <p:nvSpPr>
           <p:cNvPr id="2" name="Rectangle 1"/>
@@ -10613,6 +10738,7 @@
           <a:lstStyle/>
           <a:p>
             <a:pPr algn="ctr"/>
+            <a:endParaRPr/>
           </a:p>
         </p:txBody>
       </p:sp>
@@ -10633,7 +10759,7 @@
           <a:noFill/>
         </p:spPr>
         <p:txBody>
-          <a:bodyPr wrap="square" anchor="t" lIns="0" rIns="0" tIns="0" bIns="0">
+          <a:bodyPr wrap="square" lIns="0" tIns="0" rIns="0" bIns="0" anchor="t">
             <a:spAutoFit/>
           </a:bodyPr>
           <a:lstStyle/>
@@ -10678,7 +10804,7 @@
           <a:noFill/>
         </p:spPr>
         <p:txBody>
-          <a:bodyPr wrap="square" anchor="t" lIns="0" rIns="0" tIns="0" bIns="0">
+          <a:bodyPr wrap="square" lIns="0" tIns="0" rIns="0" bIns="0" anchor="t">
             <a:spAutoFit/>
           </a:bodyPr>
           <a:lstStyle/>
@@ -10834,6 +10960,7 @@
           <a:lstStyle/>
           <a:p>
             <a:pPr algn="ctr"/>
+            <a:endParaRPr/>
           </a:p>
         </p:txBody>
       </p:sp>
@@ -10878,6 +11005,7 @@
           <a:lstStyle/>
           <a:p>
             <a:pPr algn="ctr"/>
+            <a:endParaRPr/>
           </a:p>
         </p:txBody>
       </p:sp>
@@ -10898,7 +11026,7 @@
           <a:noFill/>
         </p:spPr>
         <p:txBody>
-          <a:bodyPr wrap="square" anchor="t" lIns="0" rIns="0" tIns="0" bIns="0">
+          <a:bodyPr wrap="square" lIns="0" tIns="0" rIns="0" bIns="0" anchor="t">
             <a:spAutoFit/>
           </a:bodyPr>
           <a:lstStyle/>
@@ -10965,7 +11093,7 @@
                 </a:solidFill>
                 <a:latin typeface="Calibri"/>
               </a:rPr>
-              <a:t>The configurability engine. Products, rules, screens, and API calls — configured by your operations team. Drag, drop, done.</a:t>
+              <a:t>The configurability engine. Products, rules, screens, and API calls — configured by your business team. Drag, drop, done.</a:t>
             </a:r>
           </a:p>
         </p:txBody>
@@ -11011,6 +11139,7 @@
           <a:lstStyle/>
           <a:p>
             <a:pPr algn="ctr"/>
+            <a:endParaRPr/>
           </a:p>
         </p:txBody>
       </p:sp>
@@ -11055,6 +11184,7 @@
           <a:lstStyle/>
           <a:p>
             <a:pPr algn="ctr"/>
+            <a:endParaRPr/>
           </a:p>
         </p:txBody>
       </p:sp>
@@ -11075,7 +11205,7 @@
           <a:noFill/>
         </p:spPr>
         <p:txBody>
-          <a:bodyPr wrap="square" anchor="t" lIns="0" rIns="0" tIns="0" bIns="0">
+          <a:bodyPr wrap="square" lIns="0" tIns="0" rIns="0" bIns="0" anchor="t">
             <a:spAutoFit/>
           </a:bodyPr>
           <a:lstStyle/>
@@ -11188,6 +11318,7 @@
           <a:lstStyle/>
           <a:p>
             <a:pPr algn="ctr"/>
+            <a:endParaRPr/>
           </a:p>
         </p:txBody>
       </p:sp>
@@ -11232,6 +11363,7 @@
           <a:lstStyle/>
           <a:p>
             <a:pPr algn="ctr"/>
+            <a:endParaRPr/>
           </a:p>
         </p:txBody>
       </p:sp>
@@ -11252,7 +11384,7 @@
           <a:noFill/>
         </p:spPr>
         <p:txBody>
-          <a:bodyPr wrap="square" anchor="t" lIns="0" rIns="0" tIns="0" bIns="0">
+          <a:bodyPr wrap="square" lIns="0" tIns="0" rIns="0" bIns="0" anchor="t">
             <a:spAutoFit/>
           </a:bodyPr>
           <a:lstStyle/>
@@ -11365,6 +11497,7 @@
           <a:lstStyle/>
           <a:p>
             <a:pPr algn="ctr"/>
+            <a:endParaRPr/>
           </a:p>
         </p:txBody>
       </p:sp>
@@ -11409,6 +11542,7 @@
           <a:lstStyle/>
           <a:p>
             <a:pPr algn="ctr"/>
+            <a:endParaRPr/>
           </a:p>
         </p:txBody>
       </p:sp>
@@ -11429,7 +11563,7 @@
           <a:noFill/>
         </p:spPr>
         <p:txBody>
-          <a:bodyPr wrap="square" anchor="t" lIns="0" rIns="0" tIns="0" bIns="0">
+          <a:bodyPr wrap="square" lIns="0" tIns="0" rIns="0" bIns="0" anchor="t">
             <a:spAutoFit/>
           </a:bodyPr>
           <a:lstStyle/>
@@ -11542,6 +11676,7 @@
           <a:lstStyle/>
           <a:p>
             <a:pPr algn="ctr"/>
+            <a:endParaRPr/>
           </a:p>
         </p:txBody>
       </p:sp>
@@ -11586,6 +11721,7 @@
           <a:lstStyle/>
           <a:p>
             <a:pPr algn="ctr"/>
+            <a:endParaRPr/>
           </a:p>
         </p:txBody>
       </p:sp>
@@ -11606,7 +11742,7 @@
           <a:noFill/>
         </p:spPr>
         <p:txBody>
-          <a:bodyPr wrap="square" anchor="t" lIns="0" rIns="0" tIns="0" bIns="0">
+          <a:bodyPr wrap="square" lIns="0" tIns="0" rIns="0" bIns="0" anchor="t">
             <a:spAutoFit/>
           </a:bodyPr>
           <a:lstStyle/>
@@ -11695,7 +11831,7 @@
           <a:noFill/>
         </p:spPr>
         <p:txBody>
-          <a:bodyPr wrap="square" anchor="t" lIns="0" rIns="0" tIns="0" bIns="0">
+          <a:bodyPr wrap="square" lIns="0" tIns="0" rIns="0" bIns="0" anchor="t">
             <a:spAutoFit/>
           </a:bodyPr>
           <a:lstStyle/>
@@ -11732,7 +11868,7 @@
 </file>
 
 <file path=ppt/slides/slide8.xml><?xml version="1.0" encoding="utf-8"?>
-<p:sld xmlns:a="http://schemas.openxmlformats.org/drawingml/2006/main" xmlns:p="http://schemas.openxmlformats.org/presentationml/2006/main" xmlns:r="http://schemas.openxmlformats.org/officeDocument/2006/relationships">
+<p:sld xmlns:a="http://schemas.openxmlformats.org/drawingml/2006/main" xmlns:r="http://schemas.openxmlformats.org/officeDocument/2006/relationships" xmlns:p="http://schemas.openxmlformats.org/presentationml/2006/main">
   <p:cSld>
     <p:bg>
       <p:bgPr>
@@ -11748,7 +11884,14 @@
         <p:cNvGrpSpPr/>
         <p:nvPr/>
       </p:nvGrpSpPr>
-      <p:grpSpPr/>
+      <p:grpSpPr>
+        <a:xfrm>
+          <a:off x="0" y="0"/>
+          <a:ext cx="0" cy="0"/>
+          <a:chOff x="0" y="0"/>
+          <a:chExt cx="0" cy="0"/>
+        </a:xfrm>
+      </p:grpSpPr>
       <p:sp>
         <p:nvSpPr>
           <p:cNvPr id="2" name="Rectangle 1"/>
@@ -11790,6 +11933,7 @@
           <a:lstStyle/>
           <a:p>
             <a:pPr algn="ctr"/>
+            <a:endParaRPr/>
           </a:p>
         </p:txBody>
       </p:sp>
@@ -11810,7 +11954,7 @@
           <a:noFill/>
         </p:spPr>
         <p:txBody>
-          <a:bodyPr wrap="square" anchor="t" lIns="0" rIns="0" tIns="0" bIns="0">
+          <a:bodyPr wrap="square" lIns="0" tIns="0" rIns="0" bIns="0" anchor="t">
             <a:spAutoFit/>
           </a:bodyPr>
           <a:lstStyle/>
@@ -11855,7 +11999,7 @@
           <a:noFill/>
         </p:spPr>
         <p:txBody>
-          <a:bodyPr wrap="square" anchor="t" lIns="0" rIns="0" tIns="0" bIns="0">
+          <a:bodyPr wrap="square" lIns="0" tIns="0" rIns="0" bIns="0" anchor="t">
             <a:spAutoFit/>
           </a:bodyPr>
           <a:lstStyle/>
@@ -11987,7 +12131,7 @@
           <a:noFill/>
         </p:spPr>
         <p:txBody>
-          <a:bodyPr wrap="square" anchor="t" lIns="0" rIns="0" tIns="0" bIns="0">
+          <a:bodyPr wrap="square" lIns="0" tIns="0" rIns="0" bIns="0" anchor="t">
             <a:spAutoFit/>
           </a:bodyPr>
           <a:lstStyle/>
@@ -12032,7 +12176,7 @@
           <a:noFill/>
         </p:spPr>
         <p:txBody>
-          <a:bodyPr wrap="square" anchor="t" lIns="0" rIns="0" tIns="0" bIns="0">
+          <a:bodyPr wrap="square" lIns="0" tIns="0" rIns="0" bIns="0" anchor="t">
             <a:spAutoFit/>
           </a:bodyPr>
           <a:lstStyle/>
@@ -12095,7 +12239,7 @@
                 </a:solidFill>
                 <a:latin typeface="Calibri"/>
               </a:rPr>
-              <a:t>A drag-and-drop studio built for operations people — no code, no manual</a:t>
+              <a:t>A drag-and-drop studio built for business teams — no code, no manual</a:t>
             </a:r>
           </a:p>
           <a:p>
@@ -12203,6 +12347,7 @@
           <a:lstStyle/>
           <a:p>
             <a:pPr algn="ctr"/>
+            <a:endParaRPr/>
           </a:p>
         </p:txBody>
       </p:sp>
@@ -12247,6 +12392,7 @@
           <a:lstStyle/>
           <a:p>
             <a:pPr algn="ctr"/>
+            <a:endParaRPr/>
           </a:p>
         </p:txBody>
       </p:sp>
@@ -12267,7 +12413,7 @@
           <a:noFill/>
         </p:spPr>
         <p:txBody>
-          <a:bodyPr wrap="square" anchor="t" lIns="0" rIns="0" tIns="0" bIns="0">
+          <a:bodyPr wrap="square" lIns="0" tIns="0" rIns="0" bIns="0" anchor="t">
             <a:spAutoFit/>
           </a:bodyPr>
           <a:lstStyle/>
@@ -12312,7 +12458,7 @@
                 </a:solidFill>
                 <a:latin typeface="Cambria"/>
               </a:rPr>
-              <a:t>Your operations team</a:t>
+              <a:t>Your business team</a:t>
             </a:r>
           </a:p>
           <a:p>
@@ -12370,7 +12516,7 @@
 </file>
 
 <file path=ppt/slides/slide9.xml><?xml version="1.0" encoding="utf-8"?>
-<p:sld xmlns:a="http://schemas.openxmlformats.org/drawingml/2006/main" xmlns:p="http://schemas.openxmlformats.org/presentationml/2006/main" xmlns:r="http://schemas.openxmlformats.org/officeDocument/2006/relationships">
+<p:sld xmlns:a="http://schemas.openxmlformats.org/drawingml/2006/main" xmlns:r="http://schemas.openxmlformats.org/officeDocument/2006/relationships" xmlns:p="http://schemas.openxmlformats.org/presentationml/2006/main">
   <p:cSld>
     <p:bg>
       <p:bgPr>
@@ -12386,7 +12532,14 @@
         <p:cNvGrpSpPr/>
         <p:nvPr/>
       </p:nvGrpSpPr>
-      <p:grpSpPr/>
+      <p:grpSpPr>
+        <a:xfrm>
+          <a:off x="0" y="0"/>
+          <a:ext cx="0" cy="0"/>
+          <a:chOff x="0" y="0"/>
+          <a:chExt cx="0" cy="0"/>
+        </a:xfrm>
+      </p:grpSpPr>
       <p:sp>
         <p:nvSpPr>
           <p:cNvPr id="2" name="Rectangle 1"/>
@@ -12428,6 +12581,7 @@
           <a:lstStyle/>
           <a:p>
             <a:pPr algn="ctr"/>
+            <a:endParaRPr/>
           </a:p>
         </p:txBody>
       </p:sp>
@@ -12448,7 +12602,7 @@
           <a:noFill/>
         </p:spPr>
         <p:txBody>
-          <a:bodyPr wrap="square" anchor="t" lIns="0" rIns="0" tIns="0" bIns="0">
+          <a:bodyPr wrap="square" lIns="0" tIns="0" rIns="0" bIns="0" anchor="t">
             <a:spAutoFit/>
           </a:bodyPr>
           <a:lstStyle/>
@@ -12493,7 +12647,7 @@
           <a:noFill/>
         </p:spPr>
         <p:txBody>
-          <a:bodyPr wrap="square" anchor="t" lIns="0" rIns="0" tIns="0" bIns="0">
+          <a:bodyPr wrap="square" lIns="0" tIns="0" rIns="0" bIns="0" anchor="t">
             <a:spAutoFit/>
           </a:bodyPr>
           <a:lstStyle/>
@@ -12625,7 +12779,7 @@
           <a:noFill/>
         </p:spPr>
         <p:txBody>
-          <a:bodyPr wrap="square" anchor="t" lIns="0" rIns="0" tIns="0" bIns="0">
+          <a:bodyPr wrap="square" lIns="0" tIns="0" rIns="0" bIns="0" anchor="t">
             <a:spAutoFit/>
           </a:bodyPr>
           <a:lstStyle/>
@@ -12670,7 +12824,7 @@
           <a:noFill/>
         </p:spPr>
         <p:txBody>
-          <a:bodyPr wrap="square" anchor="t" lIns="0" rIns="0" tIns="0" bIns="0">
+          <a:bodyPr wrap="square" lIns="0" tIns="0" rIns="0" bIns="0" anchor="t">
             <a:spAutoFit/>
           </a:bodyPr>
           <a:lstStyle/>
@@ -12841,6 +12995,7 @@
           <a:lstStyle/>
           <a:p>
             <a:pPr algn="ctr"/>
+            <a:endParaRPr/>
           </a:p>
         </p:txBody>
       </p:sp>
@@ -12885,6 +13040,7 @@
           <a:lstStyle/>
           <a:p>
             <a:pPr algn="ctr"/>
+            <a:endParaRPr/>
           </a:p>
         </p:txBody>
       </p:sp>
@@ -12905,7 +13061,7 @@
           <a:noFill/>
         </p:spPr>
         <p:txBody>
-          <a:bodyPr wrap="square" anchor="t" lIns="0" rIns="0" tIns="0" bIns="0">
+          <a:bodyPr wrap="square" lIns="0" tIns="0" rIns="0" bIns="0" anchor="t">
             <a:spAutoFit/>
           </a:bodyPr>
           <a:lstStyle/>
